--- a/Slides/Phase2_Phase3_Stakeholder_Deck_v1.pptx
+++ b/Slides/Phase2_Phase3_Stakeholder_Deck_v1.pptx
@@ -1366,7 +1366,7 @@
           <a:lstStyle/>
           <a:p>
             <a:r>
-              <a:t>Clearance remains near threshold while binding, hERG, and Caco-2 remain below targets. Current strategy prioritizes focused optimization of classification tasks.</a:t>
+              <a:t>Clearance remains near threshold while binding, hERG, and Caco-2 remain below targets. Current strategy prioritizes split-leakage mitigation and re-benchmarking.</a:t>
             </a:r>
           </a:p>
         </p:txBody>
@@ -1506,7 +1506,7 @@
           <a:lstStyle/>
           <a:p>
             <a:r>
-              <a:t>Targeted head fine-tuning is the shortest path to improve classification metrics without destabilizing the full model.</a:t>
+              <a:t>Leakage control is prioritized before further model optimization so metric deltas remain trustworthy.</a:t>
             </a:r>
           </a:p>
         </p:txBody>
@@ -5300,7 +5300,7 @@
               </a:defRPr>
             </a:pPr>
             <a:r>
-              <a:t>Snapshot date: Mar 4, 2026</a:t>
+              <a:t>Snapshot date: Mar 8, 2026</a:t>
             </a:r>
           </a:p>
         </p:txBody>
@@ -6537,7 +6537,7 @@
                   <a:srgbClr val="141414"/>
                 </a:solidFill>
               </a:rPr>
-              <a:t>Slide 20 — Latest Results vs Targets (Mar 4, 2026)</a:t>
+              <a:t>Slide 20 — Latest Results vs Targets (Mar 8, 2026)</a:t>
             </a:r>
           </a:p>
         </p:txBody>
@@ -6572,7 +6572,7 @@
               </a:defRPr>
             </a:pPr>
             <a:r>
-              <a:t>Binding R²: -0.029 (target &gt; 0.60) → not met</a:t>
+              <a:t>Binding R²: 0.0019 (target &gt; 0.60) → not met</a:t>
             </a:r>
           </a:p>
           <a:p>
@@ -6584,7 +6584,7 @@
               </a:defRPr>
             </a:pPr>
             <a:r>
-              <a:t>hERG AUROC: 0.482 (target &gt; 0.80) → not met</a:t>
+              <a:t>hERG AUROC: 0.4836 (target &gt; 0.80) → not met</a:t>
             </a:r>
           </a:p>
           <a:p>
@@ -6596,7 +6596,7 @@
               </a:defRPr>
             </a:pPr>
             <a:r>
-              <a:t>Caco-2 AUROC: 0.518 (target &gt; 0.75) → not met</a:t>
+              <a:t>Caco-2 AUROC: 0.4719 (target &gt; 0.75) → not met</a:t>
             </a:r>
           </a:p>
           <a:p>
@@ -6608,7 +6608,19 @@
               </a:defRPr>
             </a:pPr>
             <a:r>
-              <a:t>Clearance RMSE: 0.969 (target &lt; 1.00) → met</a:t>
+              <a:t>Clearance RMSE: 0.9766 (target &lt; 1.00) → met</a:t>
+            </a:r>
+          </a:p>
+          <a:p>
+            <a:pPr>
+              <a:defRPr sz="2400">
+                <a:solidFill>
+                  <a:srgbClr val="1E1E1E"/>
+                </a:solidFill>
+              </a:defRPr>
+            </a:pPr>
+            <a:r>
+              <a:t>Locked thresholds: hERG=0.49, Caco-2=0.50</a:t>
             </a:r>
           </a:p>
         </p:txBody>
@@ -6771,7 +6783,7 @@
                   <a:srgbClr val="141414"/>
                 </a:solidFill>
               </a:rPr>
-              <a:t>Slide 22 — Primary Next Action: Task-Specific Fine-Tuning</a:t>
+              <a:t>Slide 22 — Primary Next Action: Split-Leakage Mitigation</a:t>
             </a:r>
           </a:p>
         </p:txBody>
@@ -6806,7 +6818,7 @@
               </a:defRPr>
             </a:pPr>
             <a:r>
-              <a:t>Freeze shared encoder + ODE backbone</a:t>
+              <a:t>Fix split strategy for leakage-prone tasks (starting with binding)</a:t>
             </a:r>
           </a:p>
           <a:p>
@@ -6818,7 +6830,7 @@
               </a:defRPr>
             </a:pPr>
             <a:r>
-              <a:t>Fine-tune hERG and Caco-2 task heads</a:t>
+              <a:t>Re-run quality gate and confirm zero overlap leakage</a:t>
             </a:r>
           </a:p>
           <a:p>
@@ -6830,7 +6842,7 @@
               </a:defRPr>
             </a:pPr>
             <a:r>
-              <a:t>Tune thresholds and compare AUROC/F1 to canonical benchmark</a:t>
+              <a:t>Re-benchmark with locked thresholds and compare against Mar 8 snapshot</a:t>
             </a:r>
           </a:p>
         </p:txBody>
